--- a/HCB_알고리즘_변경내역_0714-0805.pptx
+++ b/HCB_알고리즘_변경내역_0714-0805.pptx
@@ -15,6 +15,8 @@
     <p:sldId id="263" r:id="rId14"/>
     <p:sldId id="265" r:id="rId16"/>
     <p:sldId id="266" r:id="rId17"/>
+    <p:sldId id="267" r:id="rId18"/>
+    <p:sldId id="268" r:id="rId19"/>
     <p:sldId id="264" r:id="rId15"/>
   </p:sldIdLst>
   <p:sldSz cx="12191695" cy="6858000" type="screen4x3"/>
@@ -3350,7 +3352,7 @@
                 </a:solidFill>
                 <a:latin typeface="맑은 고딕"/>
               </a:rPr>
-              <a:t>2026. 7. 14  →  8. 5   (약 3주간)</a:t>
+              <a:t>2026. 7. 14  →  8. 11   (약 4주간)</a:t>
             </a:r>
           </a:p>
         </p:txBody>
@@ -5834,6 +5836,1995 @@
                 <a:latin typeface="맑은 고딕"/>
               </a:rPr>
               <a:t>•  WaferSeqTab에서만 지정·원복 → Step 시퀀스 본딩에는 영향 없음</a:t>
+            </a:r>
+          </a:p>
+        </p:txBody>
+      </p:sp>
+    </p:spTree>
+  </p:cSld>
+  <p:clrMapOvr>
+    <a:masterClrMapping/>
+  </p:clrMapOvr>
+</p:sld>
+</file>
+
+<file path=ppt/slides/slide12.xml><?xml version="1.0" encoding="utf-8"?>
+<p:sld xmlns:a="http://schemas.openxmlformats.org/drawingml/2006/main" xmlns:p="http://schemas.openxmlformats.org/presentationml/2006/main" xmlns:r="http://schemas.openxmlformats.org/officeDocument/2006/relationships">
+  <p:cSld>
+    <p:spTree>
+      <p:nvGrpSpPr>
+        <p:cNvPr id="1" name=""/>
+        <p:cNvGrpSpPr/>
+        <p:nvPr/>
+      </p:nvGrpSpPr>
+      <p:grpSpPr/>
+      <p:sp>
+        <p:nvSpPr>
+          <p:cNvPr id="2" name="Rectangle 1"/>
+          <p:cNvSpPr/>
+          <p:nvPr/>
+        </p:nvSpPr>
+        <p:spPr>
+          <a:xfrm>
+            <a:off x="0" y="0"/>
+            <a:ext cx="12191695" cy="6858000"/>
+          </a:xfrm>
+          <a:prstGeom prst="rect">
+            <a:avLst/>
+          </a:prstGeom>
+          <a:solidFill>
+            <a:srgbClr val="F4F8FA"/>
+          </a:solidFill>
+          <a:ln>
+            <a:noFill/>
+          </a:ln>
+          <a:effectLst/>
+        </p:spPr>
+        <p:style>
+          <a:lnRef idx="1">
+            <a:schemeClr val="accent1"/>
+          </a:lnRef>
+          <a:fillRef idx="3">
+            <a:schemeClr val="accent1"/>
+          </a:fillRef>
+          <a:effectRef idx="2">
+            <a:schemeClr val="accent1"/>
+          </a:effectRef>
+          <a:fontRef idx="minor">
+            <a:schemeClr val="lt1"/>
+          </a:fontRef>
+        </p:style>
+        <p:txBody>
+          <a:bodyPr rtlCol="0" anchor="ctr"/>
+          <a:lstStyle/>
+          <a:p>
+            <a:pPr algn="ctr"/>
+          </a:p>
+        </p:txBody>
+      </p:sp>
+      <p:sp>
+        <p:nvSpPr>
+          <p:cNvPr id="3" name="Rectangle 2"/>
+          <p:cNvSpPr/>
+          <p:nvPr/>
+        </p:nvSpPr>
+        <p:spPr>
+          <a:xfrm>
+            <a:off x="0" y="0"/>
+            <a:ext cx="12191695" cy="1417320"/>
+          </a:xfrm>
+          <a:prstGeom prst="rect">
+            <a:avLst/>
+          </a:prstGeom>
+          <a:solidFill>
+            <a:srgbClr val="0E2233"/>
+          </a:solidFill>
+          <a:ln>
+            <a:noFill/>
+          </a:ln>
+          <a:effectLst/>
+        </p:spPr>
+        <p:style>
+          <a:lnRef idx="1">
+            <a:schemeClr val="accent1"/>
+          </a:lnRef>
+          <a:fillRef idx="3">
+            <a:schemeClr val="accent1"/>
+          </a:fillRef>
+          <a:effectRef idx="2">
+            <a:schemeClr val="accent1"/>
+          </a:effectRef>
+          <a:fontRef idx="minor">
+            <a:schemeClr val="lt1"/>
+          </a:fontRef>
+        </p:style>
+        <p:txBody>
+          <a:bodyPr rtlCol="0" anchor="ctr"/>
+          <a:lstStyle/>
+          <a:p>
+            <a:pPr algn="ctr"/>
+          </a:p>
+        </p:txBody>
+      </p:sp>
+      <p:sp>
+        <p:nvSpPr>
+          <p:cNvPr id="4" name="Rounded Rectangle 3"/>
+          <p:cNvSpPr/>
+          <p:nvPr/>
+        </p:nvSpPr>
+        <p:spPr>
+          <a:xfrm>
+            <a:off x="640080" y="457200"/>
+            <a:ext cx="1417320" cy="457200"/>
+          </a:xfrm>
+          <a:prstGeom prst="roundRect">
+            <a:avLst>
+              <a:gd name="adj" fmla="val 8000"/>
+            </a:avLst>
+          </a:prstGeom>
+          <a:solidFill>
+            <a:srgbClr val="C77F3B"/>
+          </a:solidFill>
+          <a:ln>
+            <a:noFill/>
+          </a:ln>
+          <a:effectLst/>
+        </p:spPr>
+        <p:style>
+          <a:lnRef idx="1">
+            <a:schemeClr val="accent1"/>
+          </a:lnRef>
+          <a:fillRef idx="3">
+            <a:schemeClr val="accent1"/>
+          </a:fillRef>
+          <a:effectRef idx="2">
+            <a:schemeClr val="accent1"/>
+          </a:effectRef>
+          <a:fontRef idx="minor">
+            <a:schemeClr val="lt1"/>
+          </a:fontRef>
+        </p:style>
+        <p:txBody>
+          <a:bodyPr rtlCol="0" anchor="ctr"/>
+          <a:lstStyle/>
+          <a:p>
+            <a:pPr algn="ctr"/>
+          </a:p>
+        </p:txBody>
+      </p:sp>
+      <p:sp>
+        <p:nvSpPr>
+          <p:cNvPr id="5" name="TextBox 4"/>
+          <p:cNvSpPr txBox="1"/>
+          <p:nvPr/>
+        </p:nvSpPr>
+        <p:spPr>
+          <a:xfrm>
+            <a:off x="640080" y="457200"/>
+            <a:ext cx="1417320" cy="457200"/>
+          </a:xfrm>
+          <a:prstGeom prst="rect">
+            <a:avLst/>
+          </a:prstGeom>
+          <a:noFill/>
+        </p:spPr>
+        <p:txBody>
+          <a:bodyPr wrap="square" anchor="ctr" lIns="0" rIns="0" tIns="0" bIns="0">
+            <a:spAutoFit/>
+          </a:bodyPr>
+          <a:lstStyle/>
+          <a:p>
+            <a:pPr algn="ctr"/>
+            <a:r>
+              <a:rPr sz="1400" b="1">
+                <a:solidFill>
+                  <a:srgbClr val="FFFFFF"/>
+                </a:solidFill>
+                <a:latin typeface="맑은 고딕"/>
+              </a:rPr>
+              <a:t>8/6–7</a:t>
+            </a:r>
+          </a:p>
+        </p:txBody>
+      </p:sp>
+      <p:sp>
+        <p:nvSpPr>
+          <p:cNvPr id="6" name="TextBox 5"/>
+          <p:cNvSpPr txBox="1"/>
+          <p:nvPr/>
+        </p:nvSpPr>
+        <p:spPr>
+          <a:xfrm>
+            <a:off x="2240280" y="310896"/>
+            <a:ext cx="9326880" cy="548640"/>
+          </a:xfrm>
+          <a:prstGeom prst="rect">
+            <a:avLst/>
+          </a:prstGeom>
+          <a:noFill/>
+        </p:spPr>
+        <p:txBody>
+          <a:bodyPr wrap="square" anchor="t" lIns="0" rIns="0" tIns="0" bIns="0">
+            <a:spAutoFit/>
+          </a:bodyPr>
+          <a:lstStyle/>
+          <a:p>
+            <a:pPr algn="l"/>
+            <a:r>
+              <a:rPr sz="2600" b="1">
+                <a:solidFill>
+                  <a:srgbClr val="FFFFFF"/>
+                </a:solidFill>
+                <a:latin typeface="맑은 고딕"/>
+              </a:rPr>
+              <a:t>좌표 통합 개선 · 실측 캘리브레이션 위치 · 안정화 수정</a:t>
+            </a:r>
+          </a:p>
+        </p:txBody>
+      </p:sp>
+      <p:sp>
+        <p:nvSpPr>
+          <p:cNvPr id="7" name="TextBox 6"/>
+          <p:cNvSpPr txBox="1"/>
+          <p:nvPr/>
+        </p:nvSpPr>
+        <p:spPr>
+          <a:xfrm>
+            <a:off x="2240280" y="896112"/>
+            <a:ext cx="9326880" cy="411480"/>
+          </a:xfrm>
+          <a:prstGeom prst="rect">
+            <a:avLst/>
+          </a:prstGeom>
+          <a:noFill/>
+        </p:spPr>
+        <p:txBody>
+          <a:bodyPr wrap="square" anchor="t" lIns="0" rIns="0" tIns="0" bIns="0">
+            <a:spAutoFit/>
+          </a:bodyPr>
+          <a:lstStyle/>
+          <a:p>
+            <a:pPr algn="l"/>
+            <a:r>
+              <a:rPr sz="1300" b="0">
+                <a:solidFill>
+                  <a:srgbClr val="9FC2D2"/>
+                </a:solidFill>
+                <a:latin typeface="맑은 고딕"/>
+              </a:rPr>
+              <a:t>Top Fiducial 기준 좌표 통합을 확장하고, 실측 캘리브레이션 위치를 정비하며 잔여 버그를 수정</a:t>
+            </a:r>
+          </a:p>
+        </p:txBody>
+      </p:sp>
+      <p:sp>
+        <p:nvSpPr>
+          <p:cNvPr id="8" name="Rounded Rectangle 7"/>
+          <p:cNvSpPr/>
+          <p:nvPr/>
+        </p:nvSpPr>
+        <p:spPr>
+          <a:xfrm>
+            <a:off x="640080" y="1783080"/>
+            <a:ext cx="3413760" cy="4480560"/>
+          </a:xfrm>
+          <a:prstGeom prst="roundRect">
+            <a:avLst>
+              <a:gd name="adj" fmla="val 8000"/>
+            </a:avLst>
+          </a:prstGeom>
+          <a:solidFill>
+            <a:srgbClr val="FFFFFF"/>
+          </a:solidFill>
+          <a:ln w="12700">
+            <a:solidFill>
+              <a:srgbClr val="D6E2E8"/>
+            </a:solidFill>
+          </a:ln>
+          <a:effectLst/>
+          <a:effectLst>
+            <a:outerShdw blurRad="60000" dist="25000" dir="5400000" rotWithShape="0">
+              <a:srgbClr val="9FB4C0">
+                <a:alpha val="32000"/>
+              </a:srgbClr>
+            </a:outerShdw>
+          </a:effectLst>
+        </p:spPr>
+        <p:style>
+          <a:lnRef idx="1">
+            <a:schemeClr val="accent1"/>
+          </a:lnRef>
+          <a:fillRef idx="3">
+            <a:schemeClr val="accent1"/>
+          </a:fillRef>
+          <a:effectRef idx="2">
+            <a:schemeClr val="accent1"/>
+          </a:effectRef>
+          <a:fontRef idx="minor">
+            <a:schemeClr val="lt1"/>
+          </a:fontRef>
+        </p:style>
+        <p:txBody>
+          <a:bodyPr rtlCol="0" anchor="ctr"/>
+          <a:lstStyle/>
+          <a:p>
+            <a:pPr algn="ctr"/>
+          </a:p>
+        </p:txBody>
+      </p:sp>
+      <p:sp>
+        <p:nvSpPr>
+          <p:cNvPr id="9" name="Oval 8"/>
+          <p:cNvSpPr/>
+          <p:nvPr/>
+        </p:nvSpPr>
+        <p:spPr>
+          <a:xfrm>
+            <a:off x="960119" y="2103120"/>
+            <a:ext cx="640080" cy="640080"/>
+          </a:xfrm>
+          <a:prstGeom prst="ellipse">
+            <a:avLst/>
+          </a:prstGeom>
+          <a:solidFill>
+            <a:srgbClr val="0B4F6C"/>
+          </a:solidFill>
+          <a:ln>
+            <a:noFill/>
+          </a:ln>
+          <a:effectLst/>
+        </p:spPr>
+        <p:style>
+          <a:lnRef idx="1">
+            <a:schemeClr val="accent1"/>
+          </a:lnRef>
+          <a:fillRef idx="3">
+            <a:schemeClr val="accent1"/>
+          </a:fillRef>
+          <a:effectRef idx="2">
+            <a:schemeClr val="accent1"/>
+          </a:effectRef>
+          <a:fontRef idx="minor">
+            <a:schemeClr val="lt1"/>
+          </a:fontRef>
+        </p:style>
+        <p:txBody>
+          <a:bodyPr rtlCol="0" anchor="ctr"/>
+          <a:lstStyle/>
+          <a:p>
+            <a:pPr algn="ctr"/>
+          </a:p>
+        </p:txBody>
+      </p:sp>
+      <p:sp>
+        <p:nvSpPr>
+          <p:cNvPr id="10" name="TextBox 9"/>
+          <p:cNvSpPr txBox="1"/>
+          <p:nvPr/>
+        </p:nvSpPr>
+        <p:spPr>
+          <a:xfrm>
+            <a:off x="960119" y="2103120"/>
+            <a:ext cx="640080" cy="640080"/>
+          </a:xfrm>
+          <a:prstGeom prst="rect">
+            <a:avLst/>
+          </a:prstGeom>
+          <a:noFill/>
+        </p:spPr>
+        <p:txBody>
+          <a:bodyPr wrap="square" anchor="ctr" lIns="0" rIns="0" tIns="0" bIns="0">
+            <a:spAutoFit/>
+          </a:bodyPr>
+          <a:lstStyle/>
+          <a:p>
+            <a:pPr algn="ctr"/>
+            <a:r>
+              <a:rPr sz="2000" b="1">
+                <a:solidFill>
+                  <a:srgbClr val="FFFFFF"/>
+                </a:solidFill>
+                <a:latin typeface="맑은 고딕"/>
+              </a:rPr>
+              <a:t>좌</a:t>
+            </a:r>
+          </a:p>
+        </p:txBody>
+      </p:sp>
+      <p:sp>
+        <p:nvSpPr>
+          <p:cNvPr id="11" name="TextBox 10"/>
+          <p:cNvSpPr txBox="1"/>
+          <p:nvPr/>
+        </p:nvSpPr>
+        <p:spPr>
+          <a:xfrm>
+            <a:off x="1737360" y="2130552"/>
+            <a:ext cx="2087880" cy="594360"/>
+          </a:xfrm>
+          <a:prstGeom prst="rect">
+            <a:avLst/>
+          </a:prstGeom>
+          <a:noFill/>
+        </p:spPr>
+        <p:txBody>
+          <a:bodyPr wrap="square" anchor="ctr" lIns="0" rIns="0" tIns="0" bIns="0">
+            <a:spAutoFit/>
+          </a:bodyPr>
+          <a:lstStyle/>
+          <a:p>
+            <a:pPr algn="l"/>
+            <a:r>
+              <a:rPr sz="1550" b="1">
+                <a:solidFill>
+                  <a:srgbClr val="16323F"/>
+                </a:solidFill>
+                <a:latin typeface="맑은 고딕"/>
+              </a:rPr>
+              <a:t>BTM Align 통합 방식</a:t>
+            </a:r>
+          </a:p>
+        </p:txBody>
+      </p:sp>
+      <p:sp>
+        <p:nvSpPr>
+          <p:cNvPr id="12" name="TextBox 11"/>
+          <p:cNvSpPr txBox="1"/>
+          <p:nvPr/>
+        </p:nvSpPr>
+        <p:spPr>
+          <a:xfrm>
+            <a:off x="987552" y="2926080"/>
+            <a:ext cx="2755392" cy="3108960"/>
+          </a:xfrm>
+          <a:prstGeom prst="rect">
+            <a:avLst/>
+          </a:prstGeom>
+          <a:noFill/>
+        </p:spPr>
+        <p:txBody>
+          <a:bodyPr wrap="square" anchor="t" lIns="0" rIns="0" tIns="0" bIns="0">
+            <a:spAutoFit/>
+          </a:bodyPr>
+          <a:lstStyle/>
+          <a:p>
+            <a:pPr algn="l">
+              <a:lnSpc>
+                <a:spcPct val="105000"/>
+              </a:lnSpc>
+              <a:spcAft>
+                <a:spcPts val="800"/>
+              </a:spcAft>
+            </a:pPr>
+            <a:r>
+              <a:rPr sz="1250" b="0">
+                <a:solidFill>
+                  <a:srgbClr val="2C4652"/>
+                </a:solidFill>
+                <a:latin typeface="맑은 고딕"/>
+              </a:rPr>
+              <a:t>•  BTM Align도 자신의 Fiducial 상대거리(Align-Fid)로 계산 후 기준(bfl·bfr)에 정합</a:t>
+            </a:r>
+          </a:p>
+          <a:p>
+            <a:pPr algn="l">
+              <a:lnSpc>
+                <a:spcPct val="105000"/>
+              </a:lnSpc>
+              <a:spcAft>
+                <a:spcPts val="800"/>
+              </a:spcAft>
+            </a:pPr>
+            <a:r>
+              <a:rPr sz="1250" b="0">
+                <a:solidFill>
+                  <a:srgbClr val="2C4652"/>
+                </a:solidFill>
+                <a:latin typeface="맑은 고딕"/>
+              </a:rPr>
+              <a:t>•  Align·Fid를 같은 카메라(좌 HC1·우 HC2)로 측정 → 카메라 거리(Hc2Offset) 오차에 불변</a:t>
+              <a:p>
+                <a:pPr algn="l">
+                  <a:lnSpc>
+                    <a:spcPct val="105000"/>
+                  </a:lnSpc>
+                  <a:spcAft>
+                    <a:spcPts val="800"/>
+                  </a:spcAft>
+                </a:pPr>
+                <a:r>
+                  <a:rPr sz="1250" b="0">
+                    <a:solidFill>
+                      <a:srgbClr val="2C4652"/>
+                    </a:solidFill>
+                    <a:latin typeface="맑은 고딕"/>
+                  </a:rPr>
+                  <a:t>•  우측(br)이 Hc2Offset 대신 bfr 기준으로 합쳐져 캘리브레이션 의존도 추가 감소</a:t>
+                </a:r>
+              </a:p>
+            </a:r>
+          </a:p>
+        </p:txBody>
+      </p:sp>
+      <p:sp>
+        <p:nvSpPr>
+          <p:cNvPr id="13" name="Rounded Rectangle 12"/>
+          <p:cNvSpPr/>
+          <p:nvPr/>
+        </p:nvSpPr>
+        <p:spPr>
+          <a:xfrm>
+            <a:off x="4373880" y="1783080"/>
+            <a:ext cx="3413760" cy="4480560"/>
+          </a:xfrm>
+          <a:prstGeom prst="roundRect">
+            <a:avLst>
+              <a:gd name="adj" fmla="val 8000"/>
+            </a:avLst>
+          </a:prstGeom>
+          <a:solidFill>
+            <a:srgbClr val="FFFFFF"/>
+          </a:solidFill>
+          <a:ln w="12700">
+            <a:solidFill>
+              <a:srgbClr val="D6E2E8"/>
+            </a:solidFill>
+          </a:ln>
+          <a:effectLst/>
+          <a:effectLst>
+            <a:outerShdw blurRad="60000" dist="25000" dir="5400000" rotWithShape="0">
+              <a:srgbClr val="9FB4C0">
+                <a:alpha val="32000"/>
+              </a:srgbClr>
+            </a:outerShdw>
+          </a:effectLst>
+        </p:spPr>
+        <p:style>
+          <a:lnRef idx="1">
+            <a:schemeClr val="accent1"/>
+          </a:lnRef>
+          <a:fillRef idx="3">
+            <a:schemeClr val="accent1"/>
+          </a:fillRef>
+          <a:effectRef idx="2">
+            <a:schemeClr val="accent1"/>
+          </a:effectRef>
+          <a:fontRef idx="minor">
+            <a:schemeClr val="lt1"/>
+          </a:fontRef>
+        </p:style>
+        <p:txBody>
+          <a:bodyPr rtlCol="0" anchor="ctr"/>
+          <a:lstStyle/>
+          <a:p>
+            <a:pPr algn="ctr"/>
+          </a:p>
+        </p:txBody>
+      </p:sp>
+      <p:sp>
+        <p:nvSpPr>
+          <p:cNvPr id="14" name="Oval 13"/>
+          <p:cNvSpPr/>
+          <p:nvPr/>
+        </p:nvSpPr>
+        <p:spPr>
+          <a:xfrm>
+            <a:off x="4693920" y="2103120"/>
+            <a:ext cx="640080" cy="640080"/>
+          </a:xfrm>
+          <a:prstGeom prst="ellipse">
+            <a:avLst/>
+          </a:prstGeom>
+          <a:solidFill>
+            <a:srgbClr val="1C7293"/>
+          </a:solidFill>
+          <a:ln>
+            <a:noFill/>
+          </a:ln>
+          <a:effectLst/>
+        </p:spPr>
+        <p:style>
+          <a:lnRef idx="1">
+            <a:schemeClr val="accent1"/>
+          </a:lnRef>
+          <a:fillRef idx="3">
+            <a:schemeClr val="accent1"/>
+          </a:fillRef>
+          <a:effectRef idx="2">
+            <a:schemeClr val="accent1"/>
+          </a:effectRef>
+          <a:fontRef idx="minor">
+            <a:schemeClr val="lt1"/>
+          </a:fontRef>
+        </p:style>
+        <p:txBody>
+          <a:bodyPr rtlCol="0" anchor="ctr"/>
+          <a:lstStyle/>
+          <a:p>
+            <a:pPr algn="ctr"/>
+          </a:p>
+        </p:txBody>
+      </p:sp>
+      <p:sp>
+        <p:nvSpPr>
+          <p:cNvPr id="15" name="TextBox 14"/>
+          <p:cNvSpPr txBox="1"/>
+          <p:nvPr/>
+        </p:nvSpPr>
+        <p:spPr>
+          <a:xfrm>
+            <a:off x="4693920" y="2103120"/>
+            <a:ext cx="640080" cy="640080"/>
+          </a:xfrm>
+          <a:prstGeom prst="rect">
+            <a:avLst/>
+          </a:prstGeom>
+          <a:noFill/>
+        </p:spPr>
+        <p:txBody>
+          <a:bodyPr wrap="square" anchor="ctr" lIns="0" rIns="0" tIns="0" bIns="0">
+            <a:spAutoFit/>
+          </a:bodyPr>
+          <a:lstStyle/>
+          <a:p>
+            <a:pPr algn="ctr"/>
+            <a:r>
+              <a:rPr sz="2000" b="1">
+                <a:solidFill>
+                  <a:srgbClr val="FFFFFF"/>
+                </a:solidFill>
+                <a:latin typeface="맑은 고딕"/>
+              </a:rPr>
+              <a:t>위</a:t>
+            </a:r>
+          </a:p>
+        </p:txBody>
+      </p:sp>
+      <p:sp>
+        <p:nvSpPr>
+          <p:cNvPr id="16" name="TextBox 15"/>
+          <p:cNvSpPr txBox="1"/>
+          <p:nvPr/>
+        </p:nvSpPr>
+        <p:spPr>
+          <a:xfrm>
+            <a:off x="5471160" y="2130552"/>
+            <a:ext cx="2087880" cy="594360"/>
+          </a:xfrm>
+          <a:prstGeom prst="rect">
+            <a:avLst/>
+          </a:prstGeom>
+          <a:noFill/>
+        </p:spPr>
+        <p:txBody>
+          <a:bodyPr wrap="square" anchor="ctr" lIns="0" rIns="0" tIns="0" bIns="0">
+            <a:spAutoFit/>
+          </a:bodyPr>
+          <a:lstStyle/>
+          <a:p>
+            <a:pPr algn="l"/>
+            <a:r>
+              <a:rPr sz="1550" b="1">
+                <a:solidFill>
+                  <a:srgbClr val="16323F"/>
+                </a:solidFill>
+                <a:latin typeface="맑은 고딕"/>
+              </a:rPr>
+              <a:t>실측 캘리브레이션 위치</a:t>
+            </a:r>
+          </a:p>
+        </p:txBody>
+      </p:sp>
+      <p:sp>
+        <p:nvSpPr>
+          <p:cNvPr id="17" name="TextBox 16"/>
+          <p:cNvSpPr txBox="1"/>
+          <p:nvPr/>
+        </p:nvSpPr>
+        <p:spPr>
+          <a:xfrm>
+            <a:off x="4721352" y="2926080"/>
+            <a:ext cx="2755392" cy="3108960"/>
+          </a:xfrm>
+          <a:prstGeom prst="rect">
+            <a:avLst/>
+          </a:prstGeom>
+          <a:noFill/>
+        </p:spPr>
+        <p:txBody>
+          <a:bodyPr wrap="square" anchor="t" lIns="0" rIns="0" tIns="0" bIns="0">
+            <a:spAutoFit/>
+          </a:bodyPr>
+          <a:lstStyle/>
+          <a:p>
+            <a:pPr algn="l">
+              <a:lnSpc>
+                <a:spcPct val="105000"/>
+              </a:lnSpc>
+              <a:spcAft>
+                <a:spcPts val="800"/>
+              </a:spcAft>
+            </a:pPr>
+            <a:r>
+              <a:rPr sz="1250" b="0">
+                <a:solidFill>
+                  <a:srgbClr val="2C4652"/>
+                </a:solidFill>
+                <a:latin typeface="맑은 고딕"/>
+              </a:rPr>
+              <a:t>•  Real Calibration을 사용자가 클릭한 Die 위치에서 수행하도록 변경</a:t>
+            </a:r>
+          </a:p>
+          <a:p>
+            <a:pPr algn="l">
+              <a:lnSpc>
+                <a:spcPct val="105000"/>
+              </a:lnSpc>
+              <a:spcAft>
+                <a:spcPts val="800"/>
+              </a:spcAft>
+            </a:pPr>
+            <a:r>
+              <a:rPr sz="1250" b="0">
+                <a:solidFill>
+                  <a:srgbClr val="2C4652"/>
+                </a:solidFill>
+                <a:latin typeface="맑은 고딕"/>
+              </a:rPr>
+              <a:t>•  측정 위치와 캘리브레이션 위치를 일치시켜 위치 의존 오차 최소화</a:t>
+            </a:r>
+          </a:p>
+        </p:txBody>
+      </p:sp>
+      <p:sp>
+        <p:nvSpPr>
+          <p:cNvPr id="18" name="Rounded Rectangle 17"/>
+          <p:cNvSpPr/>
+          <p:nvPr/>
+        </p:nvSpPr>
+        <p:spPr>
+          <a:xfrm>
+            <a:off x="8107680" y="1783080"/>
+            <a:ext cx="3413760" cy="4480560"/>
+          </a:xfrm>
+          <a:prstGeom prst="roundRect">
+            <a:avLst>
+              <a:gd name="adj" fmla="val 8000"/>
+            </a:avLst>
+          </a:prstGeom>
+          <a:solidFill>
+            <a:srgbClr val="FFFFFF"/>
+          </a:solidFill>
+          <a:ln w="12700">
+            <a:solidFill>
+              <a:srgbClr val="D6E2E8"/>
+            </a:solidFill>
+          </a:ln>
+          <a:effectLst/>
+          <a:effectLst>
+            <a:outerShdw blurRad="60000" dist="25000" dir="5400000" rotWithShape="0">
+              <a:srgbClr val="9FB4C0">
+                <a:alpha val="32000"/>
+              </a:srgbClr>
+            </a:outerShdw>
+          </a:effectLst>
+        </p:spPr>
+        <p:style>
+          <a:lnRef idx="1">
+            <a:schemeClr val="accent1"/>
+          </a:lnRef>
+          <a:fillRef idx="3">
+            <a:schemeClr val="accent1"/>
+          </a:fillRef>
+          <a:effectRef idx="2">
+            <a:schemeClr val="accent1"/>
+          </a:effectRef>
+          <a:fontRef idx="minor">
+            <a:schemeClr val="lt1"/>
+          </a:fontRef>
+        </p:style>
+        <p:txBody>
+          <a:bodyPr rtlCol="0" anchor="ctr"/>
+          <a:lstStyle/>
+          <a:p>
+            <a:pPr algn="ctr"/>
+          </a:p>
+        </p:txBody>
+      </p:sp>
+      <p:sp>
+        <p:nvSpPr>
+          <p:cNvPr id="19" name="Oval 18"/>
+          <p:cNvSpPr/>
+          <p:nvPr/>
+        </p:nvSpPr>
+        <p:spPr>
+          <a:xfrm>
+            <a:off x="8427720" y="2103120"/>
+            <a:ext cx="640080" cy="640080"/>
+          </a:xfrm>
+          <a:prstGeom prst="ellipse">
+            <a:avLst/>
+          </a:prstGeom>
+          <a:solidFill>
+            <a:srgbClr val="C77F3B"/>
+          </a:solidFill>
+          <a:ln>
+            <a:noFill/>
+          </a:ln>
+          <a:effectLst/>
+        </p:spPr>
+        <p:style>
+          <a:lnRef idx="1">
+            <a:schemeClr val="accent1"/>
+          </a:lnRef>
+          <a:fillRef idx="3">
+            <a:schemeClr val="accent1"/>
+          </a:fillRef>
+          <a:effectRef idx="2">
+            <a:schemeClr val="accent1"/>
+          </a:effectRef>
+          <a:fontRef idx="minor">
+            <a:schemeClr val="lt1"/>
+          </a:fontRef>
+        </p:style>
+        <p:txBody>
+          <a:bodyPr rtlCol="0" anchor="ctr"/>
+          <a:lstStyle/>
+          <a:p>
+            <a:pPr algn="ctr"/>
+          </a:p>
+        </p:txBody>
+      </p:sp>
+      <p:sp>
+        <p:nvSpPr>
+          <p:cNvPr id="20" name="TextBox 19"/>
+          <p:cNvSpPr txBox="1"/>
+          <p:nvPr/>
+        </p:nvSpPr>
+        <p:spPr>
+          <a:xfrm>
+            <a:off x="8427720" y="2103120"/>
+            <a:ext cx="640080" cy="640080"/>
+          </a:xfrm>
+          <a:prstGeom prst="rect">
+            <a:avLst/>
+          </a:prstGeom>
+          <a:noFill/>
+        </p:spPr>
+        <p:txBody>
+          <a:bodyPr wrap="square" anchor="ctr" lIns="0" rIns="0" tIns="0" bIns="0">
+            <a:spAutoFit/>
+          </a:bodyPr>
+          <a:lstStyle/>
+          <a:p>
+            <a:pPr algn="ctr"/>
+            <a:r>
+              <a:rPr sz="2000" b="1">
+                <a:solidFill>
+                  <a:srgbClr val="FFFFFF"/>
+                </a:solidFill>
+                <a:latin typeface="맑은 고딕"/>
+              </a:rPr>
+              <a:t>정</a:t>
+            </a:r>
+          </a:p>
+        </p:txBody>
+      </p:sp>
+      <p:sp>
+        <p:nvSpPr>
+          <p:cNvPr id="21" name="TextBox 20"/>
+          <p:cNvSpPr txBox="1"/>
+          <p:nvPr/>
+        </p:nvSpPr>
+        <p:spPr>
+          <a:xfrm>
+            <a:off x="9204960" y="2130552"/>
+            <a:ext cx="2087880" cy="594360"/>
+          </a:xfrm>
+          <a:prstGeom prst="rect">
+            <a:avLst/>
+          </a:prstGeom>
+          <a:noFill/>
+        </p:spPr>
+        <p:txBody>
+          <a:bodyPr wrap="square" anchor="ctr" lIns="0" rIns="0" tIns="0" bIns="0">
+            <a:spAutoFit/>
+          </a:bodyPr>
+          <a:lstStyle/>
+          <a:p>
+            <a:pPr algn="l"/>
+            <a:r>
+              <a:rPr sz="1550" b="1">
+                <a:solidFill>
+                  <a:srgbClr val="16323F"/>
+                </a:solidFill>
+                <a:latin typeface="맑은 고딕"/>
+              </a:rPr>
+              <a:t>안정화 · 버그 수정</a:t>
+            </a:r>
+          </a:p>
+        </p:txBody>
+      </p:sp>
+      <p:sp>
+        <p:nvSpPr>
+          <p:cNvPr id="22" name="TextBox 21"/>
+          <p:cNvSpPr txBox="1"/>
+          <p:nvPr/>
+        </p:nvSpPr>
+        <p:spPr>
+          <a:xfrm>
+            <a:off x="8455152" y="2926080"/>
+            <a:ext cx="2755392" cy="3108960"/>
+          </a:xfrm>
+          <a:prstGeom prst="rect">
+            <a:avLst/>
+          </a:prstGeom>
+          <a:noFill/>
+        </p:spPr>
+        <p:txBody>
+          <a:bodyPr wrap="square" anchor="t" lIns="0" rIns="0" tIns="0" bIns="0">
+            <a:spAutoFit/>
+          </a:bodyPr>
+          <a:lstStyle/>
+          <a:p>
+            <a:pPr algn="l">
+              <a:lnSpc>
+                <a:spcPct val="105000"/>
+              </a:lnSpc>
+              <a:spcAft>
+                <a:spcPts val="800"/>
+              </a:spcAft>
+            </a:pPr>
+            <a:r>
+              <a:rPr sz="1250" b="0">
+                <a:solidFill>
+                  <a:srgbClr val="2C4652"/>
+                </a:solidFill>
+                <a:latin typeface="맑은 고딕"/>
+              </a:rPr>
+              <a:t>•  버니어키 측정 중 정지 버튼이 동작하지 않던 문제 해결</a:t>
+            </a:r>
+          </a:p>
+          <a:p>
+            <a:pPr algn="l">
+              <a:lnSpc>
+                <a:spcPct val="105000"/>
+              </a:lnSpc>
+              <a:spcAft>
+                <a:spcPts val="800"/>
+              </a:spcAft>
+            </a:pPr>
+            <a:r>
+              <a:rPr sz="1250" b="0">
+                <a:solidFill>
+                  <a:srgbClr val="2C4652"/>
+                </a:solidFill>
+                <a:latin typeface="맑은 고딕"/>
+              </a:rPr>
+              <a:t>•  Init 시퀀스 정비 및 관련 모션 상수 추가</a:t>
+              <a:p>
+                <a:pPr algn="l">
+                  <a:lnSpc>
+                    <a:spcPct val="105000"/>
+                  </a:lnSpc>
+                  <a:spcAft>
+                    <a:spcPts val="800"/>
+                  </a:spcAft>
+                </a:pPr>
+                <a:r>
+                  <a:rPr sz="1250" b="0">
+                    <a:solidFill>
+                      <a:srgbClr val="2C4652"/>
+                    </a:solidFill>
+                    <a:latin typeface="맑은 고딕"/>
+                  </a:rPr>
+                  <a:t>•  통신 메시지 타입 처리 오류 수정</a:t>
+                </a:r>
+              </a:p>
+            </a:r>
+          </a:p>
+        </p:txBody>
+      </p:sp>
+    </p:spTree>
+  </p:cSld>
+  <p:clrMapOvr>
+    <a:masterClrMapping/>
+  </p:clrMapOvr>
+</p:sld>
+</file>
+
+<file path=ppt/slides/slide13.xml><?xml version="1.0" encoding="utf-8"?>
+<p:sld xmlns:a="http://schemas.openxmlformats.org/drawingml/2006/main" xmlns:p="http://schemas.openxmlformats.org/presentationml/2006/main" xmlns:r="http://schemas.openxmlformats.org/officeDocument/2006/relationships">
+  <p:cSld>
+    <p:spTree>
+      <p:nvGrpSpPr>
+        <p:cNvPr id="1" name=""/>
+        <p:cNvGrpSpPr/>
+        <p:nvPr/>
+      </p:nvGrpSpPr>
+      <p:grpSpPr/>
+      <p:sp>
+        <p:nvSpPr>
+          <p:cNvPr id="2" name="Rectangle 1"/>
+          <p:cNvSpPr/>
+          <p:nvPr/>
+        </p:nvSpPr>
+        <p:spPr>
+          <a:xfrm>
+            <a:off x="0" y="0"/>
+            <a:ext cx="12191695" cy="6858000"/>
+          </a:xfrm>
+          <a:prstGeom prst="rect">
+            <a:avLst/>
+          </a:prstGeom>
+          <a:solidFill>
+            <a:srgbClr val="F4F8FA"/>
+          </a:solidFill>
+          <a:ln>
+            <a:noFill/>
+          </a:ln>
+          <a:effectLst/>
+        </p:spPr>
+        <p:style>
+          <a:lnRef idx="1">
+            <a:schemeClr val="accent1"/>
+          </a:lnRef>
+          <a:fillRef idx="3">
+            <a:schemeClr val="accent1"/>
+          </a:fillRef>
+          <a:effectRef idx="2">
+            <a:schemeClr val="accent1"/>
+          </a:effectRef>
+          <a:fontRef idx="minor">
+            <a:schemeClr val="lt1"/>
+          </a:fontRef>
+        </p:style>
+        <p:txBody>
+          <a:bodyPr rtlCol="0" anchor="ctr"/>
+          <a:lstStyle/>
+          <a:p>
+            <a:pPr algn="ctr"/>
+          </a:p>
+        </p:txBody>
+      </p:sp>
+      <p:sp>
+        <p:nvSpPr>
+          <p:cNvPr id="3" name="Rectangle 2"/>
+          <p:cNvSpPr/>
+          <p:nvPr/>
+        </p:nvSpPr>
+        <p:spPr>
+          <a:xfrm>
+            <a:off x="0" y="0"/>
+            <a:ext cx="12191695" cy="1417320"/>
+          </a:xfrm>
+          <a:prstGeom prst="rect">
+            <a:avLst/>
+          </a:prstGeom>
+          <a:solidFill>
+            <a:srgbClr val="0E2233"/>
+          </a:solidFill>
+          <a:ln>
+            <a:noFill/>
+          </a:ln>
+          <a:effectLst/>
+        </p:spPr>
+        <p:style>
+          <a:lnRef idx="1">
+            <a:schemeClr val="accent1"/>
+          </a:lnRef>
+          <a:fillRef idx="3">
+            <a:schemeClr val="accent1"/>
+          </a:fillRef>
+          <a:effectRef idx="2">
+            <a:schemeClr val="accent1"/>
+          </a:effectRef>
+          <a:fontRef idx="minor">
+            <a:schemeClr val="lt1"/>
+          </a:fontRef>
+        </p:style>
+        <p:txBody>
+          <a:bodyPr rtlCol="0" anchor="ctr"/>
+          <a:lstStyle/>
+          <a:p>
+            <a:pPr algn="ctr"/>
+          </a:p>
+        </p:txBody>
+      </p:sp>
+      <p:sp>
+        <p:nvSpPr>
+          <p:cNvPr id="4" name="Rounded Rectangle 3"/>
+          <p:cNvSpPr/>
+          <p:nvPr/>
+        </p:nvSpPr>
+        <p:spPr>
+          <a:xfrm>
+            <a:off x="640080" y="457200"/>
+            <a:ext cx="1417320" cy="457200"/>
+          </a:xfrm>
+          <a:prstGeom prst="roundRect">
+            <a:avLst>
+              <a:gd name="adj" fmla="val 8000"/>
+            </a:avLst>
+          </a:prstGeom>
+          <a:solidFill>
+            <a:srgbClr val="C77F3B"/>
+          </a:solidFill>
+          <a:ln>
+            <a:noFill/>
+          </a:ln>
+          <a:effectLst/>
+        </p:spPr>
+        <p:style>
+          <a:lnRef idx="1">
+            <a:schemeClr val="accent1"/>
+          </a:lnRef>
+          <a:fillRef idx="3">
+            <a:schemeClr val="accent1"/>
+          </a:fillRef>
+          <a:effectRef idx="2">
+            <a:schemeClr val="accent1"/>
+          </a:effectRef>
+          <a:fontRef idx="minor">
+            <a:schemeClr val="lt1"/>
+          </a:fontRef>
+        </p:style>
+        <p:txBody>
+          <a:bodyPr rtlCol="0" anchor="ctr"/>
+          <a:lstStyle/>
+          <a:p>
+            <a:pPr algn="ctr"/>
+          </a:p>
+        </p:txBody>
+      </p:sp>
+      <p:sp>
+        <p:nvSpPr>
+          <p:cNvPr id="5" name="TextBox 4"/>
+          <p:cNvSpPr txBox="1"/>
+          <p:nvPr/>
+        </p:nvSpPr>
+        <p:spPr>
+          <a:xfrm>
+            <a:off x="640080" y="457200"/>
+            <a:ext cx="1417320" cy="457200"/>
+          </a:xfrm>
+          <a:prstGeom prst="rect">
+            <a:avLst/>
+          </a:prstGeom>
+          <a:noFill/>
+        </p:spPr>
+        <p:txBody>
+          <a:bodyPr wrap="square" anchor="ctr" lIns="0" rIns="0" tIns="0" bIns="0">
+            <a:spAutoFit/>
+          </a:bodyPr>
+          <a:lstStyle/>
+          <a:p>
+            <a:pPr algn="ctr"/>
+            <a:r>
+              <a:rPr sz="1400" b="1">
+                <a:solidFill>
+                  <a:srgbClr val="FFFFFF"/>
+                </a:solidFill>
+                <a:latin typeface="맑은 고딕"/>
+              </a:rPr>
+              <a:t>8/9–11</a:t>
+            </a:r>
+          </a:p>
+        </p:txBody>
+      </p:sp>
+      <p:sp>
+        <p:nvSpPr>
+          <p:cNvPr id="6" name="TextBox 5"/>
+          <p:cNvSpPr txBox="1"/>
+          <p:nvPr/>
+        </p:nvSpPr>
+        <p:spPr>
+          <a:xfrm>
+            <a:off x="2240280" y="310896"/>
+            <a:ext cx="9326880" cy="548640"/>
+          </a:xfrm>
+          <a:prstGeom prst="rect">
+            <a:avLst/>
+          </a:prstGeom>
+          <a:noFill/>
+        </p:spPr>
+        <p:txBody>
+          <a:bodyPr wrap="square" anchor="t" lIns="0" rIns="0" tIns="0" bIns="0">
+            <a:spAutoFit/>
+          </a:bodyPr>
+          <a:lstStyle/>
+          <a:p>
+            <a:pPr algn="l"/>
+            <a:r>
+              <a:rPr sz="2600" b="1">
+                <a:solidFill>
+                  <a:srgbClr val="FFFFFF"/>
+                </a:solidFill>
+                <a:latin typeface="맑은 고딕"/>
+              </a:rPr>
+              <a:t>H_T 회전 오차 알람 · Right Fiducial 유사도 · 비전 측정 탭</a:t>
+            </a:r>
+          </a:p>
+        </p:txBody>
+      </p:sp>
+      <p:sp>
+        <p:nvSpPr>
+          <p:cNvPr id="7" name="TextBox 6"/>
+          <p:cNvSpPr txBox="1"/>
+          <p:nvPr/>
+        </p:nvSpPr>
+        <p:spPr>
+          <a:xfrm>
+            <a:off x="2240280" y="896112"/>
+            <a:ext cx="9326880" cy="411480"/>
+          </a:xfrm>
+          <a:prstGeom prst="rect">
+            <a:avLst/>
+          </a:prstGeom>
+          <a:noFill/>
+        </p:spPr>
+        <p:txBody>
+          <a:bodyPr wrap="square" anchor="t" lIns="0" rIns="0" tIns="0" bIns="0">
+            <a:spAutoFit/>
+          </a:bodyPr>
+          <a:lstStyle/>
+          <a:p>
+            <a:pPr algn="l"/>
+            <a:r>
+              <a:rPr sz="1300" b="0">
+                <a:solidFill>
+                  <a:srgbClr val="9FC2D2"/>
+                </a:solidFill>
+                <a:latin typeface="맑은 고딕"/>
+              </a:rPr>
+              <a:t>본딩 직전 회전 보정을 검증하고, 우측 Fiducial 유사변환 보정과 카메라 비전 측정 도구를 추가</a:t>
+            </a:r>
+          </a:p>
+        </p:txBody>
+      </p:sp>
+      <p:sp>
+        <p:nvSpPr>
+          <p:cNvPr id="8" name="Rounded Rectangle 7"/>
+          <p:cNvSpPr/>
+          <p:nvPr/>
+        </p:nvSpPr>
+        <p:spPr>
+          <a:xfrm>
+            <a:off x="640080" y="1783080"/>
+            <a:ext cx="3413760" cy="4480560"/>
+          </a:xfrm>
+          <a:prstGeom prst="roundRect">
+            <a:avLst>
+              <a:gd name="adj" fmla="val 8000"/>
+            </a:avLst>
+          </a:prstGeom>
+          <a:solidFill>
+            <a:srgbClr val="FFFFFF"/>
+          </a:solidFill>
+          <a:ln w="12700">
+            <a:solidFill>
+              <a:srgbClr val="D6E2E8"/>
+            </a:solidFill>
+          </a:ln>
+          <a:effectLst/>
+          <a:effectLst>
+            <a:outerShdw blurRad="60000" dist="25000" dir="5400000" rotWithShape="0">
+              <a:srgbClr val="9FB4C0">
+                <a:alpha val="32000"/>
+              </a:srgbClr>
+            </a:outerShdw>
+          </a:effectLst>
+        </p:spPr>
+        <p:style>
+          <a:lnRef idx="1">
+            <a:schemeClr val="accent1"/>
+          </a:lnRef>
+          <a:fillRef idx="3">
+            <a:schemeClr val="accent1"/>
+          </a:fillRef>
+          <a:effectRef idx="2">
+            <a:schemeClr val="accent1"/>
+          </a:effectRef>
+          <a:fontRef idx="minor">
+            <a:schemeClr val="lt1"/>
+          </a:fontRef>
+        </p:style>
+        <p:txBody>
+          <a:bodyPr rtlCol="0" anchor="ctr"/>
+          <a:lstStyle/>
+          <a:p>
+            <a:pPr algn="ctr"/>
+          </a:p>
+        </p:txBody>
+      </p:sp>
+      <p:sp>
+        <p:nvSpPr>
+          <p:cNvPr id="9" name="Oval 8"/>
+          <p:cNvSpPr/>
+          <p:nvPr/>
+        </p:nvSpPr>
+        <p:spPr>
+          <a:xfrm>
+            <a:off x="960119" y="2103120"/>
+            <a:ext cx="640080" cy="640080"/>
+          </a:xfrm>
+          <a:prstGeom prst="ellipse">
+            <a:avLst/>
+          </a:prstGeom>
+          <a:solidFill>
+            <a:srgbClr val="0B4F6C"/>
+          </a:solidFill>
+          <a:ln>
+            <a:noFill/>
+          </a:ln>
+          <a:effectLst/>
+        </p:spPr>
+        <p:style>
+          <a:lnRef idx="1">
+            <a:schemeClr val="accent1"/>
+          </a:lnRef>
+          <a:fillRef idx="3">
+            <a:schemeClr val="accent1"/>
+          </a:fillRef>
+          <a:effectRef idx="2">
+            <a:schemeClr val="accent1"/>
+          </a:effectRef>
+          <a:fontRef idx="minor">
+            <a:schemeClr val="lt1"/>
+          </a:fontRef>
+        </p:style>
+        <p:txBody>
+          <a:bodyPr rtlCol="0" anchor="ctr"/>
+          <a:lstStyle/>
+          <a:p>
+            <a:pPr algn="ctr"/>
+          </a:p>
+        </p:txBody>
+      </p:sp>
+      <p:sp>
+        <p:nvSpPr>
+          <p:cNvPr id="10" name="TextBox 9"/>
+          <p:cNvSpPr txBox="1"/>
+          <p:nvPr/>
+        </p:nvSpPr>
+        <p:spPr>
+          <a:xfrm>
+            <a:off x="960119" y="2103120"/>
+            <a:ext cx="640080" cy="640080"/>
+          </a:xfrm>
+          <a:prstGeom prst="rect">
+            <a:avLst/>
+          </a:prstGeom>
+          <a:noFill/>
+        </p:spPr>
+        <p:txBody>
+          <a:bodyPr wrap="square" anchor="ctr" lIns="0" rIns="0" tIns="0" bIns="0">
+            <a:spAutoFit/>
+          </a:bodyPr>
+          <a:lstStyle/>
+          <a:p>
+            <a:pPr algn="ctr"/>
+            <a:r>
+              <a:rPr sz="2000" b="1">
+                <a:solidFill>
+                  <a:srgbClr val="FFFFFF"/>
+                </a:solidFill>
+                <a:latin typeface="맑은 고딕"/>
+              </a:rPr>
+              <a:t>T</a:t>
+            </a:r>
+          </a:p>
+        </p:txBody>
+      </p:sp>
+      <p:sp>
+        <p:nvSpPr>
+          <p:cNvPr id="11" name="TextBox 10"/>
+          <p:cNvSpPr txBox="1"/>
+          <p:nvPr/>
+        </p:nvSpPr>
+        <p:spPr>
+          <a:xfrm>
+            <a:off x="1737360" y="2130552"/>
+            <a:ext cx="2087880" cy="594360"/>
+          </a:xfrm>
+          <a:prstGeom prst="rect">
+            <a:avLst/>
+          </a:prstGeom>
+          <a:noFill/>
+        </p:spPr>
+        <p:txBody>
+          <a:bodyPr wrap="square" anchor="ctr" lIns="0" rIns="0" tIns="0" bIns="0">
+            <a:spAutoFit/>
+          </a:bodyPr>
+          <a:lstStyle/>
+          <a:p>
+            <a:pPr algn="l"/>
+            <a:r>
+              <a:rPr sz="1550" b="1">
+                <a:solidFill>
+                  <a:srgbClr val="16323F"/>
+                </a:solidFill>
+                <a:latin typeface="맑은 고딕"/>
+              </a:rPr>
+              <a:t>H_T 회전 오차 알람</a:t>
+            </a:r>
+          </a:p>
+        </p:txBody>
+      </p:sp>
+      <p:sp>
+        <p:nvSpPr>
+          <p:cNvPr id="12" name="TextBox 11"/>
+          <p:cNvSpPr txBox="1"/>
+          <p:nvPr/>
+        </p:nvSpPr>
+        <p:spPr>
+          <a:xfrm>
+            <a:off x="987552" y="2926080"/>
+            <a:ext cx="2755392" cy="3108960"/>
+          </a:xfrm>
+          <a:prstGeom prst="rect">
+            <a:avLst/>
+          </a:prstGeom>
+          <a:noFill/>
+        </p:spPr>
+        <p:txBody>
+          <a:bodyPr wrap="square" anchor="t" lIns="0" rIns="0" tIns="0" bIns="0">
+            <a:spAutoFit/>
+          </a:bodyPr>
+          <a:lstStyle/>
+          <a:p>
+            <a:pPr algn="l">
+              <a:lnSpc>
+                <a:spcPct val="105000"/>
+              </a:lnSpc>
+              <a:spcAft>
+                <a:spcPts val="800"/>
+              </a:spcAft>
+            </a:pPr>
+            <a:r>
+              <a:rPr sz="1250" b="0">
+                <a:solidFill>
+                  <a:srgbClr val="2C4652"/>
+                </a:solidFill>
+                <a:latin typeface="맑은 고딕"/>
+              </a:rPr>
+              <a:t>•  H_T 보정 후 명령·실제 위치를 비교해 오차율을 산출·기록</a:t>
+            </a:r>
+          </a:p>
+          <a:p>
+            <a:pPr algn="l">
+              <a:lnSpc>
+                <a:spcPct val="105000"/>
+              </a:lnSpc>
+              <a:spcAft>
+                <a:spcPts val="800"/>
+              </a:spcAft>
+            </a:pPr>
+            <a:r>
+              <a:rPr sz="1250" b="0">
+                <a:solidFill>
+                  <a:srgbClr val="2C4652"/>
+                </a:solidFill>
+                <a:latin typeface="맑은 고딕"/>
+              </a:rPr>
+              <a:t>•  오차율 1% 초과 시 전용 알람(E0036) 발생 후 본딩 중단</a:t>
+              <a:p>
+                <a:pPr algn="l">
+                  <a:lnSpc>
+                    <a:spcPct val="105000"/>
+                  </a:lnSpc>
+                  <a:spcAft>
+                    <a:spcPts val="800"/>
+                  </a:spcAft>
+                </a:pPr>
+                <a:r>
+                  <a:rPr sz="1250" b="0">
+                    <a:solidFill>
+                      <a:srgbClr val="2C4652"/>
+                    </a:solidFill>
+                    <a:latin typeface="맑은 고딕"/>
+                  </a:rPr>
+                  <a:t>•  잘못된 회전 보정이 본딩까지 진행되는 것을 사전 차단</a:t>
+                </a:r>
+              </a:p>
+            </a:r>
+          </a:p>
+        </p:txBody>
+      </p:sp>
+      <p:sp>
+        <p:nvSpPr>
+          <p:cNvPr id="13" name="Rounded Rectangle 12"/>
+          <p:cNvSpPr/>
+          <p:nvPr/>
+        </p:nvSpPr>
+        <p:spPr>
+          <a:xfrm>
+            <a:off x="4373880" y="1783080"/>
+            <a:ext cx="3413760" cy="4480560"/>
+          </a:xfrm>
+          <a:prstGeom prst="roundRect">
+            <a:avLst>
+              <a:gd name="adj" fmla="val 8000"/>
+            </a:avLst>
+          </a:prstGeom>
+          <a:solidFill>
+            <a:srgbClr val="FFFFFF"/>
+          </a:solidFill>
+          <a:ln w="12700">
+            <a:solidFill>
+              <a:srgbClr val="D6E2E8"/>
+            </a:solidFill>
+          </a:ln>
+          <a:effectLst/>
+          <a:effectLst>
+            <a:outerShdw blurRad="60000" dist="25000" dir="5400000" rotWithShape="0">
+              <a:srgbClr val="9FB4C0">
+                <a:alpha val="32000"/>
+              </a:srgbClr>
+            </a:outerShdw>
+          </a:effectLst>
+        </p:spPr>
+        <p:style>
+          <a:lnRef idx="1">
+            <a:schemeClr val="accent1"/>
+          </a:lnRef>
+          <a:fillRef idx="3">
+            <a:schemeClr val="accent1"/>
+          </a:fillRef>
+          <a:effectRef idx="2">
+            <a:schemeClr val="accent1"/>
+          </a:effectRef>
+          <a:fontRef idx="minor">
+            <a:schemeClr val="lt1"/>
+          </a:fontRef>
+        </p:style>
+        <p:txBody>
+          <a:bodyPr rtlCol="0" anchor="ctr"/>
+          <a:lstStyle/>
+          <a:p>
+            <a:pPr algn="ctr"/>
+          </a:p>
+        </p:txBody>
+      </p:sp>
+      <p:sp>
+        <p:nvSpPr>
+          <p:cNvPr id="14" name="Oval 13"/>
+          <p:cNvSpPr/>
+          <p:nvPr/>
+        </p:nvSpPr>
+        <p:spPr>
+          <a:xfrm>
+            <a:off x="4693920" y="2103120"/>
+            <a:ext cx="640080" cy="640080"/>
+          </a:xfrm>
+          <a:prstGeom prst="ellipse">
+            <a:avLst/>
+          </a:prstGeom>
+          <a:solidFill>
+            <a:srgbClr val="1C7293"/>
+          </a:solidFill>
+          <a:ln>
+            <a:noFill/>
+          </a:ln>
+          <a:effectLst/>
+        </p:spPr>
+        <p:style>
+          <a:lnRef idx="1">
+            <a:schemeClr val="accent1"/>
+          </a:lnRef>
+          <a:fillRef idx="3">
+            <a:schemeClr val="accent1"/>
+          </a:fillRef>
+          <a:effectRef idx="2">
+            <a:schemeClr val="accent1"/>
+          </a:effectRef>
+          <a:fontRef idx="minor">
+            <a:schemeClr val="lt1"/>
+          </a:fontRef>
+        </p:style>
+        <p:txBody>
+          <a:bodyPr rtlCol="0" anchor="ctr"/>
+          <a:lstStyle/>
+          <a:p>
+            <a:pPr algn="ctr"/>
+          </a:p>
+        </p:txBody>
+      </p:sp>
+      <p:sp>
+        <p:nvSpPr>
+          <p:cNvPr id="15" name="TextBox 14"/>
+          <p:cNvSpPr txBox="1"/>
+          <p:nvPr/>
+        </p:nvSpPr>
+        <p:spPr>
+          <a:xfrm>
+            <a:off x="4693920" y="2103120"/>
+            <a:ext cx="640080" cy="640080"/>
+          </a:xfrm>
+          <a:prstGeom prst="rect">
+            <a:avLst/>
+          </a:prstGeom>
+          <a:noFill/>
+        </p:spPr>
+        <p:txBody>
+          <a:bodyPr wrap="square" anchor="ctr" lIns="0" rIns="0" tIns="0" bIns="0">
+            <a:spAutoFit/>
+          </a:bodyPr>
+          <a:lstStyle/>
+          <a:p>
+            <a:pPr algn="ctr"/>
+            <a:r>
+              <a:rPr sz="2000" b="1">
+                <a:solidFill>
+                  <a:srgbClr val="FFFFFF"/>
+                </a:solidFill>
+                <a:latin typeface="맑은 고딕"/>
+              </a:rPr>
+              <a:t>유</a:t>
+            </a:r>
+          </a:p>
+        </p:txBody>
+      </p:sp>
+      <p:sp>
+        <p:nvSpPr>
+          <p:cNvPr id="16" name="TextBox 15"/>
+          <p:cNvSpPr txBox="1"/>
+          <p:nvPr/>
+        </p:nvSpPr>
+        <p:spPr>
+          <a:xfrm>
+            <a:off x="5471160" y="2130552"/>
+            <a:ext cx="2087880" cy="594360"/>
+          </a:xfrm>
+          <a:prstGeom prst="rect">
+            <a:avLst/>
+          </a:prstGeom>
+          <a:noFill/>
+        </p:spPr>
+        <p:txBody>
+          <a:bodyPr wrap="square" anchor="ctr" lIns="0" rIns="0" tIns="0" bIns="0">
+            <a:spAutoFit/>
+          </a:bodyPr>
+          <a:lstStyle/>
+          <a:p>
+            <a:pPr algn="l"/>
+            <a:r>
+              <a:rPr sz="1550" b="1">
+                <a:solidFill>
+                  <a:srgbClr val="16323F"/>
+                </a:solidFill>
+                <a:latin typeface="맑은 고딕"/>
+              </a:rPr>
+              <a:t>Right Fiducial 유사도 보정</a:t>
+            </a:r>
+          </a:p>
+        </p:txBody>
+      </p:sp>
+      <p:sp>
+        <p:nvSpPr>
+          <p:cNvPr id="17" name="TextBox 16"/>
+          <p:cNvSpPr txBox="1"/>
+          <p:nvPr/>
+        </p:nvSpPr>
+        <p:spPr>
+          <a:xfrm>
+            <a:off x="4721352" y="2926080"/>
+            <a:ext cx="2755392" cy="3108960"/>
+          </a:xfrm>
+          <a:prstGeom prst="rect">
+            <a:avLst/>
+          </a:prstGeom>
+          <a:noFill/>
+        </p:spPr>
+        <p:txBody>
+          <a:bodyPr wrap="square" anchor="t" lIns="0" rIns="0" tIns="0" bIns="0">
+            <a:spAutoFit/>
+          </a:bodyPr>
+          <a:lstStyle/>
+          <a:p>
+            <a:pPr algn="l">
+              <a:lnSpc>
+                <a:spcPct val="105000"/>
+              </a:lnSpc>
+              <a:spcAft>
+                <a:spcPts val="800"/>
+              </a:spcAft>
+            </a:pPr>
+            <a:r>
+              <a:rPr sz="1250" b="0">
+                <a:solidFill>
+                  <a:srgbClr val="2C4652"/>
+                </a:solidFill>
+                <a:latin typeface="맑은 고딕"/>
+              </a:rPr>
+              <a:t>•  우측 Fiducial 유사변환(회전+등방 스케일) 보정 옵션 추가</a:t>
+            </a:r>
+          </a:p>
+          <a:p>
+            <a:pPr algn="l">
+              <a:lnSpc>
+                <a:spcPct val="105000"/>
+              </a:lnSpc>
+              <a:spcAft>
+                <a:spcPts val="800"/>
+              </a:spcAft>
+            </a:pPr>
+            <a:r>
+              <a:rPr sz="1250" b="0">
+                <a:solidFill>
+                  <a:srgbClr val="2C4652"/>
+                </a:solidFill>
+                <a:latin typeface="맑은 고딕"/>
+              </a:rPr>
+              <a:t>•  설정 UI·뷰모델·AlignContext까지 연동, θ/scale 진단 로그</a:t>
+              <a:p>
+                <a:pPr algn="l">
+                  <a:lnSpc>
+                    <a:spcPct val="105000"/>
+                  </a:lnSpc>
+                  <a:spcAft>
+                    <a:spcPts val="800"/>
+                  </a:spcAft>
+                </a:pPr>
+                <a:r>
+                  <a:rPr sz="1250" b="0">
+                    <a:solidFill>
+                      <a:srgbClr val="2C4652"/>
+                    </a:solidFill>
+                    <a:latin typeface="맑은 고딕"/>
+                  </a:rPr>
+                  <a:t>•  RightFidSimTheta·RightFidSimScale를 CSV로 기록</a:t>
+                </a:r>
+              </a:p>
+            </a:r>
+          </a:p>
+        </p:txBody>
+      </p:sp>
+      <p:sp>
+        <p:nvSpPr>
+          <p:cNvPr id="18" name="Rounded Rectangle 17"/>
+          <p:cNvSpPr/>
+          <p:nvPr/>
+        </p:nvSpPr>
+        <p:spPr>
+          <a:xfrm>
+            <a:off x="8107680" y="1783080"/>
+            <a:ext cx="3413760" cy="4480560"/>
+          </a:xfrm>
+          <a:prstGeom prst="roundRect">
+            <a:avLst>
+              <a:gd name="adj" fmla="val 8000"/>
+            </a:avLst>
+          </a:prstGeom>
+          <a:solidFill>
+            <a:srgbClr val="FFFFFF"/>
+          </a:solidFill>
+          <a:ln w="12700">
+            <a:solidFill>
+              <a:srgbClr val="D6E2E8"/>
+            </a:solidFill>
+          </a:ln>
+          <a:effectLst/>
+          <a:effectLst>
+            <a:outerShdw blurRad="60000" dist="25000" dir="5400000" rotWithShape="0">
+              <a:srgbClr val="9FB4C0">
+                <a:alpha val="32000"/>
+              </a:srgbClr>
+            </a:outerShdw>
+          </a:effectLst>
+        </p:spPr>
+        <p:style>
+          <a:lnRef idx="1">
+            <a:schemeClr val="accent1"/>
+          </a:lnRef>
+          <a:fillRef idx="3">
+            <a:schemeClr val="accent1"/>
+          </a:fillRef>
+          <a:effectRef idx="2">
+            <a:schemeClr val="accent1"/>
+          </a:effectRef>
+          <a:fontRef idx="minor">
+            <a:schemeClr val="lt1"/>
+          </a:fontRef>
+        </p:style>
+        <p:txBody>
+          <a:bodyPr rtlCol="0" anchor="ctr"/>
+          <a:lstStyle/>
+          <a:p>
+            <a:pPr algn="ctr"/>
+          </a:p>
+        </p:txBody>
+      </p:sp>
+      <p:sp>
+        <p:nvSpPr>
+          <p:cNvPr id="19" name="Oval 18"/>
+          <p:cNvSpPr/>
+          <p:nvPr/>
+        </p:nvSpPr>
+        <p:spPr>
+          <a:xfrm>
+            <a:off x="8427720" y="2103120"/>
+            <a:ext cx="640080" cy="640080"/>
+          </a:xfrm>
+          <a:prstGeom prst="ellipse">
+            <a:avLst/>
+          </a:prstGeom>
+          <a:solidFill>
+            <a:srgbClr val="C77F3B"/>
+          </a:solidFill>
+          <a:ln>
+            <a:noFill/>
+          </a:ln>
+          <a:effectLst/>
+        </p:spPr>
+        <p:style>
+          <a:lnRef idx="1">
+            <a:schemeClr val="accent1"/>
+          </a:lnRef>
+          <a:fillRef idx="3">
+            <a:schemeClr val="accent1"/>
+          </a:fillRef>
+          <a:effectRef idx="2">
+            <a:schemeClr val="accent1"/>
+          </a:effectRef>
+          <a:fontRef idx="minor">
+            <a:schemeClr val="lt1"/>
+          </a:fontRef>
+        </p:style>
+        <p:txBody>
+          <a:bodyPr rtlCol="0" anchor="ctr"/>
+          <a:lstStyle/>
+          <a:p>
+            <a:pPr algn="ctr"/>
+          </a:p>
+        </p:txBody>
+      </p:sp>
+      <p:sp>
+        <p:nvSpPr>
+          <p:cNvPr id="20" name="TextBox 19"/>
+          <p:cNvSpPr txBox="1"/>
+          <p:nvPr/>
+        </p:nvSpPr>
+        <p:spPr>
+          <a:xfrm>
+            <a:off x="8427720" y="2103120"/>
+            <a:ext cx="640080" cy="640080"/>
+          </a:xfrm>
+          <a:prstGeom prst="rect">
+            <a:avLst/>
+          </a:prstGeom>
+          <a:noFill/>
+        </p:spPr>
+        <p:txBody>
+          <a:bodyPr wrap="square" anchor="ctr" lIns="0" rIns="0" tIns="0" bIns="0">
+            <a:spAutoFit/>
+          </a:bodyPr>
+          <a:lstStyle/>
+          <a:p>
+            <a:pPr algn="ctr"/>
+            <a:r>
+              <a:rPr sz="2000" b="1">
+                <a:solidFill>
+                  <a:srgbClr val="FFFFFF"/>
+                </a:solidFill>
+                <a:latin typeface="맑은 고딕"/>
+              </a:rPr>
+              <a:t>비</a:t>
+            </a:r>
+          </a:p>
+        </p:txBody>
+      </p:sp>
+      <p:sp>
+        <p:nvSpPr>
+          <p:cNvPr id="21" name="TextBox 20"/>
+          <p:cNvSpPr txBox="1"/>
+          <p:nvPr/>
+        </p:nvSpPr>
+        <p:spPr>
+          <a:xfrm>
+            <a:off x="9204960" y="2130552"/>
+            <a:ext cx="2087880" cy="594360"/>
+          </a:xfrm>
+          <a:prstGeom prst="rect">
+            <a:avLst/>
+          </a:prstGeom>
+          <a:noFill/>
+        </p:spPr>
+        <p:txBody>
+          <a:bodyPr wrap="square" anchor="ctr" lIns="0" rIns="0" tIns="0" bIns="0">
+            <a:spAutoFit/>
+          </a:bodyPr>
+          <a:lstStyle/>
+          <a:p>
+            <a:pPr algn="l"/>
+            <a:r>
+              <a:rPr sz="1550" b="1">
+                <a:solidFill>
+                  <a:srgbClr val="16323F"/>
+                </a:solidFill>
+                <a:latin typeface="맑은 고딕"/>
+              </a:rPr>
+              <a:t>카메라 비전 측정 탭</a:t>
+            </a:r>
+          </a:p>
+        </p:txBody>
+      </p:sp>
+      <p:sp>
+        <p:nvSpPr>
+          <p:cNvPr id="22" name="TextBox 21"/>
+          <p:cNvSpPr txBox="1"/>
+          <p:nvPr/>
+        </p:nvSpPr>
+        <p:spPr>
+          <a:xfrm>
+            <a:off x="8455152" y="2926080"/>
+            <a:ext cx="2755392" cy="3108960"/>
+          </a:xfrm>
+          <a:prstGeom prst="rect">
+            <a:avLst/>
+          </a:prstGeom>
+          <a:noFill/>
+        </p:spPr>
+        <p:txBody>
+          <a:bodyPr wrap="square" anchor="t" lIns="0" rIns="0" tIns="0" bIns="0">
+            <a:spAutoFit/>
+          </a:bodyPr>
+          <a:lstStyle/>
+          <a:p>
+            <a:pPr algn="l">
+              <a:lnSpc>
+                <a:spcPct val="105000"/>
+              </a:lnSpc>
+              <a:spcAft>
+                <a:spcPts val="800"/>
+              </a:spcAft>
+            </a:pPr>
+            <a:r>
+              <a:rPr sz="1250" b="0">
+                <a:solidFill>
+                  <a:srgbClr val="2C4652"/>
+                </a:solidFill>
+                <a:latin typeface="맑은 고딕"/>
+              </a:rPr>
+              <a:t>•  카메라(PC·HC1·HC2) 선택 측정 + 측정값·모션 정보 화면 표시</a:t>
+            </a:r>
+          </a:p>
+          <a:p>
+            <a:pPr algn="l">
+              <a:lnSpc>
+                <a:spcPct val="105000"/>
+              </a:lnSpc>
+              <a:spcAft>
+                <a:spcPts val="800"/>
+              </a:spcAft>
+            </a:pPr>
+            <a:r>
+              <a:rPr sz="1250" b="0">
+                <a:solidFill>
+                  <a:srgbClr val="2C4652"/>
+                </a:solidFill>
+                <a:latin typeface="맑은 고딕"/>
+              </a:rPr>
+              <a:t>•  HC1/HC2 Align Mark 측정 시 H_Z·h_z 초점 이동 자동 적용</a:t>
+              <a:p>
+                <a:pPr algn="l">
+                  <a:lnSpc>
+                    <a:spcPct val="105000"/>
+                  </a:lnSpc>
+                  <a:spcAft>
+                    <a:spcPts val="800"/>
+                  </a:spcAft>
+                </a:pPr>
+                <a:r>
+                  <a:rPr sz="1250" b="0">
+                    <a:solidFill>
+                      <a:srgbClr val="2C4652"/>
+                    </a:solidFill>
+                    <a:latin typeface="맑은 고딕"/>
+                  </a:rPr>
+                  <a:t>•  측정 · 이동 · 재측정 · Bonding(가압) 동작 지원</a:t>
+                </a:r>
+              </a:p>
             </a:r>
           </a:p>
         </p:txBody>
